--- a/PPTX/OS_SCH_04_GROUP08.pptx
+++ b/PPTX/OS_SCH_04_GROUP08.pptx
@@ -8637,9 +8637,6 @@
             </a:pPr>
             <a:r>
               <a:rPr lang="en-US" sz="2000" b="1" dirty="0" err="1">
-                <a:solidFill>
-                  <a:srgbClr val="226DF6"/>
-                </a:solidFill>
                 <a:effectLst/>
                 <a:latin typeface="Times New Roman" panose="02020603050405020304" pitchFamily="18" charset="0"/>
                 <a:cs typeface="Times New Roman" panose="02020603050405020304" pitchFamily="18" charset="0"/>
@@ -8648,9 +8645,6 @@
             </a:r>
             <a:r>
               <a:rPr lang="en-US" sz="2000" b="1" dirty="0">
-                <a:solidFill>
-                  <a:srgbClr val="226DF6"/>
-                </a:solidFill>
                 <a:effectLst/>
                 <a:latin typeface="Times New Roman" panose="02020603050405020304" pitchFamily="18" charset="0"/>
                 <a:cs typeface="Times New Roman" panose="02020603050405020304" pitchFamily="18" charset="0"/>
@@ -8659,9 +8653,6 @@
             </a:r>
             <a:r>
               <a:rPr lang="en-US" sz="2000" b="1" dirty="0" err="1">
-                <a:solidFill>
-                  <a:srgbClr val="226DF6"/>
-                </a:solidFill>
                 <a:effectLst/>
                 <a:latin typeface="Times New Roman" panose="02020603050405020304" pitchFamily="18" charset="0"/>
                 <a:cs typeface="Times New Roman" panose="02020603050405020304" pitchFamily="18" charset="0"/>
@@ -8670,9 +8661,6 @@
             </a:r>
             <a:r>
               <a:rPr lang="en-US" sz="2000" b="1" dirty="0">
-                <a:solidFill>
-                  <a:srgbClr val="226DF6"/>
-                </a:solidFill>
                 <a:effectLst/>
                 <a:latin typeface="Times New Roman" panose="02020603050405020304" pitchFamily="18" charset="0"/>
                 <a:cs typeface="Times New Roman" panose="02020603050405020304" pitchFamily="18" charset="0"/>
@@ -8681,9 +8669,6 @@
             </a:r>
             <a:r>
               <a:rPr lang="en-US" sz="2000" b="1" dirty="0" err="1">
-                <a:solidFill>
-                  <a:srgbClr val="226DF6"/>
-                </a:solidFill>
                 <a:effectLst/>
                 <a:latin typeface="Times New Roman" panose="02020603050405020304" pitchFamily="18" charset="0"/>
                 <a:cs typeface="Times New Roman" panose="02020603050405020304" pitchFamily="18" charset="0"/>
@@ -8692,9 +8677,6 @@
             </a:r>
             <a:r>
               <a:rPr lang="en-US" sz="2000" b="1" dirty="0">
-                <a:solidFill>
-                  <a:srgbClr val="226DF6"/>
-                </a:solidFill>
                 <a:effectLst/>
                 <a:latin typeface="Times New Roman" panose="02020603050405020304" pitchFamily="18" charset="0"/>
                 <a:cs typeface="Times New Roman" panose="02020603050405020304" pitchFamily="18" charset="0"/>
@@ -8703,9 +8685,6 @@
             </a:r>
             <a:r>
               <a:rPr lang="en-US" sz="2000" b="1" dirty="0" err="1">
-                <a:solidFill>
-                  <a:srgbClr val="226DF6"/>
-                </a:solidFill>
                 <a:effectLst/>
                 <a:latin typeface="Times New Roman" panose="02020603050405020304" pitchFamily="18" charset="0"/>
                 <a:cs typeface="Times New Roman" panose="02020603050405020304" pitchFamily="18" charset="0"/>
@@ -8714,9 +8693,6 @@
             </a:r>
             <a:r>
               <a:rPr lang="en-US" sz="2000" b="1" dirty="0">
-                <a:solidFill>
-                  <a:srgbClr val="226DF6"/>
-                </a:solidFill>
                 <a:effectLst/>
                 <a:latin typeface="Times New Roman" panose="02020603050405020304" pitchFamily="18" charset="0"/>
                 <a:cs typeface="Times New Roman" panose="02020603050405020304" pitchFamily="18" charset="0"/>
@@ -8725,9 +8701,6 @@
             </a:r>
             <a:r>
               <a:rPr lang="en-US" sz="2000" b="1" dirty="0" err="1">
-                <a:solidFill>
-                  <a:srgbClr val="226DF6"/>
-                </a:solidFill>
                 <a:effectLst/>
                 <a:latin typeface="Times New Roman" panose="02020603050405020304" pitchFamily="18" charset="0"/>
                 <a:cs typeface="Times New Roman" panose="02020603050405020304" pitchFamily="18" charset="0"/>
@@ -8736,9 +8709,6 @@
             </a:r>
             <a:r>
               <a:rPr lang="en-US" sz="2000" b="1" dirty="0">
-                <a:solidFill>
-                  <a:srgbClr val="226DF6"/>
-                </a:solidFill>
                 <a:effectLst/>
                 <a:latin typeface="Times New Roman" panose="02020603050405020304" pitchFamily="18" charset="0"/>
                 <a:cs typeface="Times New Roman" panose="02020603050405020304" pitchFamily="18" charset="0"/>
@@ -8747,9 +8717,6 @@
             </a:r>
             <a:r>
               <a:rPr lang="en-US" sz="2000" b="1" dirty="0" err="1">
-                <a:solidFill>
-                  <a:srgbClr val="226DF6"/>
-                </a:solidFill>
                 <a:effectLst/>
                 <a:latin typeface="Times New Roman" panose="02020603050405020304" pitchFamily="18" charset="0"/>
                 <a:cs typeface="Times New Roman" panose="02020603050405020304" pitchFamily="18" charset="0"/>
@@ -8758,9 +8725,6 @@
             </a:r>
             <a:r>
               <a:rPr lang="en-US" sz="2000" b="1" dirty="0">
-                <a:solidFill>
-                  <a:srgbClr val="226DF6"/>
-                </a:solidFill>
                 <a:effectLst/>
                 <a:latin typeface="Times New Roman" panose="02020603050405020304" pitchFamily="18" charset="0"/>
                 <a:cs typeface="Times New Roman" panose="02020603050405020304" pitchFamily="18" charset="0"/>
@@ -8769,9 +8733,6 @@
             </a:r>
             <a:r>
               <a:rPr lang="en-US" sz="2000" b="1" dirty="0" err="1">
-                <a:solidFill>
-                  <a:srgbClr val="226DF6"/>
-                </a:solidFill>
                 <a:effectLst/>
                 <a:latin typeface="Times New Roman" panose="02020603050405020304" pitchFamily="18" charset="0"/>
                 <a:cs typeface="Times New Roman" panose="02020603050405020304" pitchFamily="18" charset="0"/>
@@ -8979,9 +8940,6 @@
             </a:pPr>
             <a:r>
               <a:rPr lang="en-US" sz="2000" b="1" dirty="0" err="1">
-                <a:solidFill>
-                  <a:srgbClr val="226DF6"/>
-                </a:solidFill>
                 <a:effectLst/>
                 <a:latin typeface="Times New Roman" panose="02020603050405020304" pitchFamily="18" charset="0"/>
                 <a:cs typeface="Times New Roman" panose="02020603050405020304" pitchFamily="18" charset="0"/>
@@ -8990,9 +8948,6 @@
             </a:r>
             <a:r>
               <a:rPr lang="en-US" sz="2000" b="1" dirty="0">
-                <a:solidFill>
-                  <a:srgbClr val="226DF6"/>
-                </a:solidFill>
                 <a:effectLst/>
                 <a:latin typeface="Times New Roman" panose="02020603050405020304" pitchFamily="18" charset="0"/>
                 <a:cs typeface="Times New Roman" panose="02020603050405020304" pitchFamily="18" charset="0"/>
@@ -9001,9 +8956,6 @@
             </a:r>
             <a:r>
               <a:rPr lang="en-US" sz="2000" b="1" dirty="0" err="1">
-                <a:solidFill>
-                  <a:srgbClr val="226DF6"/>
-                </a:solidFill>
                 <a:effectLst/>
                 <a:latin typeface="Times New Roman" panose="02020603050405020304" pitchFamily="18" charset="0"/>
                 <a:cs typeface="Times New Roman" panose="02020603050405020304" pitchFamily="18" charset="0"/>
@@ -9012,9 +8964,6 @@
             </a:r>
             <a:r>
               <a:rPr lang="en-US" sz="2000" b="1" dirty="0">
-                <a:solidFill>
-                  <a:srgbClr val="226DF6"/>
-                </a:solidFill>
                 <a:effectLst/>
                 <a:latin typeface="Times New Roman" panose="02020603050405020304" pitchFamily="18" charset="0"/>
                 <a:cs typeface="Times New Roman" panose="02020603050405020304" pitchFamily="18" charset="0"/>
@@ -9023,9 +8972,6 @@
             </a:r>
             <a:r>
               <a:rPr lang="en-US" sz="2000" b="1" dirty="0" err="1">
-                <a:solidFill>
-                  <a:srgbClr val="226DF6"/>
-                </a:solidFill>
                 <a:effectLst/>
                 <a:latin typeface="Times New Roman" panose="02020603050405020304" pitchFamily="18" charset="0"/>
                 <a:cs typeface="Times New Roman" panose="02020603050405020304" pitchFamily="18" charset="0"/>
@@ -9034,9 +8980,6 @@
             </a:r>
             <a:r>
               <a:rPr lang="en-US" sz="2000" b="1" dirty="0">
-                <a:solidFill>
-                  <a:srgbClr val="226DF6"/>
-                </a:solidFill>
                 <a:effectLst/>
                 <a:latin typeface="Times New Roman" panose="02020603050405020304" pitchFamily="18" charset="0"/>
                 <a:cs typeface="Times New Roman" panose="02020603050405020304" pitchFamily="18" charset="0"/>
@@ -9045,9 +8988,6 @@
             </a:r>
             <a:r>
               <a:rPr lang="en-US" sz="2000" b="1" dirty="0" err="1">
-                <a:solidFill>
-                  <a:srgbClr val="226DF6"/>
-                </a:solidFill>
                 <a:effectLst/>
                 <a:latin typeface="Times New Roman" panose="02020603050405020304" pitchFamily="18" charset="0"/>
                 <a:cs typeface="Times New Roman" panose="02020603050405020304" pitchFamily="18" charset="0"/>
@@ -9255,9 +9195,6 @@
             </a:pPr>
             <a:r>
               <a:rPr lang="en-US" sz="2000" b="1" dirty="0">
-                <a:solidFill>
-                  <a:srgbClr val="226DF6"/>
-                </a:solidFill>
                 <a:effectLst/>
                 <a:latin typeface="Times New Roman" panose="02020603050405020304" pitchFamily="18" charset="0"/>
                 <a:cs typeface="Times New Roman" panose="02020603050405020304" pitchFamily="18" charset="0"/>
@@ -9266,9 +9203,6 @@
             </a:r>
             <a:r>
               <a:rPr lang="en-US" sz="2000" b="1" dirty="0" err="1">
-                <a:solidFill>
-                  <a:srgbClr val="226DF6"/>
-                </a:solidFill>
                 <a:effectLst/>
                 <a:latin typeface="Times New Roman" panose="02020603050405020304" pitchFamily="18" charset="0"/>
                 <a:cs typeface="Times New Roman" panose="02020603050405020304" pitchFamily="18" charset="0"/>
@@ -9277,9 +9211,6 @@
             </a:r>
             <a:r>
               <a:rPr lang="en-US" sz="2000" b="1" dirty="0">
-                <a:solidFill>
-                  <a:srgbClr val="226DF6"/>
-                </a:solidFill>
                 <a:effectLst/>
                 <a:latin typeface="Times New Roman" panose="02020603050405020304" pitchFamily="18" charset="0"/>
                 <a:cs typeface="Times New Roman" panose="02020603050405020304" pitchFamily="18" charset="0"/>
@@ -9288,9 +9219,6 @@
             </a:r>
             <a:r>
               <a:rPr lang="en-US" sz="2000" b="1" dirty="0" err="1">
-                <a:solidFill>
-                  <a:srgbClr val="226DF6"/>
-                </a:solidFill>
                 <a:effectLst/>
                 <a:latin typeface="Times New Roman" panose="02020603050405020304" pitchFamily="18" charset="0"/>
                 <a:cs typeface="Times New Roman" panose="02020603050405020304" pitchFamily="18" charset="0"/>
@@ -9299,9 +9227,6 @@
             </a:r>
             <a:r>
               <a:rPr lang="en-US" sz="2000" b="1" dirty="0">
-                <a:solidFill>
-                  <a:srgbClr val="226DF6"/>
-                </a:solidFill>
                 <a:effectLst/>
                 <a:latin typeface="Times New Roman" panose="02020603050405020304" pitchFamily="18" charset="0"/>
                 <a:cs typeface="Times New Roman" panose="02020603050405020304" pitchFamily="18" charset="0"/>
@@ -9310,9 +9235,6 @@
             </a:r>
             <a:r>
               <a:rPr lang="en-US" sz="2000" b="1" dirty="0" err="1">
-                <a:solidFill>
-                  <a:srgbClr val="226DF6"/>
-                </a:solidFill>
                 <a:effectLst/>
                 <a:latin typeface="Times New Roman" panose="02020603050405020304" pitchFamily="18" charset="0"/>
                 <a:cs typeface="Times New Roman" panose="02020603050405020304" pitchFamily="18" charset="0"/>
@@ -10165,9 +10087,6 @@
             </a:pPr>
             <a:r>
               <a:rPr lang="en-US" sz="2400" b="1" dirty="0" err="1">
-                <a:solidFill>
-                  <a:srgbClr val="226DF6"/>
-                </a:solidFill>
                 <a:effectLst/>
                 <a:latin typeface="Times New Roman" panose="02020603050405020304" pitchFamily="18" charset="0"/>
                 <a:cs typeface="Times New Roman" panose="02020603050405020304" pitchFamily="18" charset="0"/>
@@ -10176,9 +10095,6 @@
             </a:r>
             <a:r>
               <a:rPr lang="en-US" sz="2400" b="1" dirty="0">
-                <a:solidFill>
-                  <a:srgbClr val="226DF6"/>
-                </a:solidFill>
                 <a:effectLst/>
                 <a:latin typeface="Times New Roman" panose="02020603050405020304" pitchFamily="18" charset="0"/>
                 <a:cs typeface="Times New Roman" panose="02020603050405020304" pitchFamily="18" charset="0"/>
@@ -10187,9 +10103,6 @@
             </a:r>
             <a:r>
               <a:rPr lang="en-US" sz="2400" b="1" dirty="0" err="1">
-                <a:solidFill>
-                  <a:srgbClr val="226DF6"/>
-                </a:solidFill>
                 <a:effectLst/>
                 <a:latin typeface="Times New Roman" panose="02020603050405020304" pitchFamily="18" charset="0"/>
                 <a:cs typeface="Times New Roman" panose="02020603050405020304" pitchFamily="18" charset="0"/>
@@ -10198,9 +10111,6 @@
             </a:r>
             <a:r>
               <a:rPr lang="en-US" sz="2400" b="1" dirty="0">
-                <a:solidFill>
-                  <a:srgbClr val="226DF6"/>
-                </a:solidFill>
                 <a:effectLst/>
                 <a:latin typeface="Times New Roman" panose="02020603050405020304" pitchFamily="18" charset="0"/>
                 <a:cs typeface="Times New Roman" panose="02020603050405020304" pitchFamily="18" charset="0"/>
@@ -10209,9 +10119,6 @@
             </a:r>
             <a:r>
               <a:rPr lang="en-US" sz="2400" b="1" dirty="0" err="1">
-                <a:solidFill>
-                  <a:srgbClr val="226DF6"/>
-                </a:solidFill>
                 <a:effectLst/>
                 <a:latin typeface="Times New Roman" panose="02020603050405020304" pitchFamily="18" charset="0"/>
                 <a:cs typeface="Times New Roman" panose="02020603050405020304" pitchFamily="18" charset="0"/>
@@ -10220,9 +10127,6 @@
             </a:r>
             <a:r>
               <a:rPr lang="en-US" sz="2400" b="1" dirty="0">
-                <a:solidFill>
-                  <a:srgbClr val="226DF6"/>
-                </a:solidFill>
                 <a:effectLst/>
                 <a:latin typeface="Times New Roman" panose="02020603050405020304" pitchFamily="18" charset="0"/>
                 <a:cs typeface="Times New Roman" panose="02020603050405020304" pitchFamily="18" charset="0"/>
@@ -10231,9 +10135,6 @@
             </a:r>
             <a:r>
               <a:rPr lang="en-US" sz="2400" b="1" dirty="0" err="1">
-                <a:solidFill>
-                  <a:srgbClr val="226DF6"/>
-                </a:solidFill>
                 <a:effectLst/>
                 <a:latin typeface="Times New Roman" panose="02020603050405020304" pitchFamily="18" charset="0"/>
                 <a:cs typeface="Times New Roman" panose="02020603050405020304" pitchFamily="18" charset="0"/>
@@ -10242,9 +10143,6 @@
             </a:r>
             <a:r>
               <a:rPr lang="en-US" sz="2400" b="1" dirty="0">
-                <a:solidFill>
-                  <a:srgbClr val="226DF6"/>
-                </a:solidFill>
                 <a:effectLst/>
                 <a:latin typeface="Times New Roman" panose="02020603050405020304" pitchFamily="18" charset="0"/>
                 <a:cs typeface="Times New Roman" panose="02020603050405020304" pitchFamily="18" charset="0"/>
@@ -10253,9 +10151,6 @@
             </a:r>
             <a:r>
               <a:rPr lang="en-US" sz="2400" b="1" dirty="0" err="1">
-                <a:solidFill>
-                  <a:srgbClr val="226DF6"/>
-                </a:solidFill>
                 <a:effectLst/>
                 <a:latin typeface="Times New Roman" panose="02020603050405020304" pitchFamily="18" charset="0"/>
                 <a:cs typeface="Times New Roman" panose="02020603050405020304" pitchFamily="18" charset="0"/>
@@ -10264,9 +10159,6 @@
             </a:r>
             <a:r>
               <a:rPr lang="en-US" sz="2400" b="1" dirty="0">
-                <a:solidFill>
-                  <a:srgbClr val="226DF6"/>
-                </a:solidFill>
                 <a:effectLst/>
                 <a:latin typeface="Times New Roman" panose="02020603050405020304" pitchFamily="18" charset="0"/>
                 <a:cs typeface="Times New Roman" panose="02020603050405020304" pitchFamily="18" charset="0"/>
@@ -10275,9 +10167,6 @@
             </a:r>
             <a:r>
               <a:rPr lang="en-US" sz="2400" b="1" dirty="0" err="1">
-                <a:solidFill>
-                  <a:srgbClr val="226DF6"/>
-                </a:solidFill>
                 <a:effectLst/>
                 <a:latin typeface="Times New Roman" panose="02020603050405020304" pitchFamily="18" charset="0"/>
                 <a:cs typeface="Times New Roman" panose="02020603050405020304" pitchFamily="18" charset="0"/>
@@ -10286,9 +10175,6 @@
             </a:r>
             <a:r>
               <a:rPr lang="en-US" sz="2400" b="1" dirty="0">
-                <a:solidFill>
-                  <a:srgbClr val="226DF6"/>
-                </a:solidFill>
                 <a:effectLst/>
                 <a:latin typeface="Times New Roman" panose="02020603050405020304" pitchFamily="18" charset="0"/>
                 <a:cs typeface="Times New Roman" panose="02020603050405020304" pitchFamily="18" charset="0"/>
@@ -10297,9 +10183,6 @@
             </a:r>
             <a:r>
               <a:rPr lang="en-US" sz="2400" b="1" dirty="0" err="1">
-                <a:solidFill>
-                  <a:srgbClr val="226DF6"/>
-                </a:solidFill>
                 <a:effectLst/>
                 <a:latin typeface="Times New Roman" panose="02020603050405020304" pitchFamily="18" charset="0"/>
                 <a:cs typeface="Times New Roman" panose="02020603050405020304" pitchFamily="18" charset="0"/>
@@ -10308,9 +10191,6 @@
             </a:r>
             <a:r>
               <a:rPr lang="en-US" sz="2400" b="1" dirty="0">
-                <a:solidFill>
-                  <a:srgbClr val="226DF6"/>
-                </a:solidFill>
                 <a:effectLst/>
                 <a:latin typeface="Times New Roman" panose="02020603050405020304" pitchFamily="18" charset="0"/>
                 <a:cs typeface="Times New Roman" panose="02020603050405020304" pitchFamily="18" charset="0"/>
@@ -10319,9 +10199,6 @@
             </a:r>
             <a:r>
               <a:rPr lang="en-US" sz="2400" b="1" dirty="0" err="1">
-                <a:solidFill>
-                  <a:srgbClr val="226DF6"/>
-                </a:solidFill>
                 <a:effectLst/>
                 <a:latin typeface="Times New Roman" panose="02020603050405020304" pitchFamily="18" charset="0"/>
                 <a:cs typeface="Times New Roman" panose="02020603050405020304" pitchFamily="18" charset="0"/>
@@ -10330,9 +10207,6 @@
             </a:r>
             <a:r>
               <a:rPr lang="en-US" sz="2400" b="1" dirty="0">
-                <a:solidFill>
-                  <a:srgbClr val="226DF6"/>
-                </a:solidFill>
                 <a:effectLst/>
                 <a:latin typeface="Times New Roman" panose="02020603050405020304" pitchFamily="18" charset="0"/>
                 <a:cs typeface="Times New Roman" panose="02020603050405020304" pitchFamily="18" charset="0"/>
@@ -10341,9 +10215,6 @@
             </a:r>
             <a:r>
               <a:rPr lang="en-US" sz="2400" b="1" dirty="0" err="1">
-                <a:solidFill>
-                  <a:srgbClr val="226DF6"/>
-                </a:solidFill>
                 <a:effectLst/>
                 <a:latin typeface="Times New Roman" panose="02020603050405020304" pitchFamily="18" charset="0"/>
                 <a:cs typeface="Times New Roman" panose="02020603050405020304" pitchFamily="18" charset="0"/>
@@ -10488,9 +10359,6 @@
             </a:pPr>
             <a:r>
               <a:rPr lang="vi-VN" sz="2400" b="1" dirty="0">
-                <a:solidFill>
-                  <a:srgbClr val="226DF6"/>
-                </a:solidFill>
                 <a:effectLst/>
                 <a:latin typeface="Times New Roman" panose="02020603050405020304" pitchFamily="18" charset="0"/>
                 <a:cs typeface="Times New Roman" panose="02020603050405020304" pitchFamily="18" charset="0"/>
@@ -13927,7 +13795,7 @@
         </p:nvSpPr>
         <p:spPr>
           <a:xfrm>
-            <a:off x="2911151" y="1341122"/>
+            <a:off x="2911151" y="1779661"/>
             <a:ext cx="8994709" cy="5380357"/>
           </a:xfrm>
         </p:spPr>

--- a/PPTX/OS_SCH_04_GROUP08.pptx
+++ b/PPTX/OS_SCH_04_GROUP08.pptx
@@ -284,7 +284,7 @@
           <a:p>
             <a:fld id="{A3340687-F0A6-4844-9D0E-4A71047B582E}" type="datetime1">
               <a:rPr lang="en-GB" smtClean="0"/>
-              <a:t>17/04/2026</a:t>
+              <a:t>18/04/2026</a:t>
             </a:fld>
             <a:endParaRPr lang="en-GB"/>
           </a:p>
@@ -457,7 +457,7 @@
           <a:p>
             <a:fld id="{485F13F3-5CA4-464A-A58E-B619976AB19A}" type="datetime1">
               <a:rPr lang="en-GB" smtClean="0"/>
-              <a:t>17/04/2026</a:t>
+              <a:t>18/04/2026</a:t>
             </a:fld>
             <a:endParaRPr lang="en-GB"/>
           </a:p>
@@ -640,7 +640,7 @@
           <a:p>
             <a:fld id="{4580203B-5407-419A-8A7D-10870893C35F}" type="datetime1">
               <a:rPr lang="en-GB" smtClean="0"/>
-              <a:t>17/04/2026</a:t>
+              <a:t>18/04/2026</a:t>
             </a:fld>
             <a:endParaRPr lang="en-GB"/>
           </a:p>
@@ -846,7 +846,7 @@
             <a:fld id="{19E0BBC2-331D-455A-8F34-6CACAAA7B272}" type="datetime1">
               <a:rPr lang="en-GB" smtClean="0"/>
               <a:pPr/>
-              <a:t>17/04/2026</a:t>
+              <a:t>18/04/2026</a:t>
             </a:fld>
             <a:endParaRPr lang="en-GB"/>
           </a:p>
@@ -1104,7 +1104,7 @@
           <a:p>
             <a:fld id="{52796F3C-EA11-4B8E-A5D6-898715DAA61A}" type="datetime1">
               <a:rPr lang="en-GB" smtClean="0"/>
-              <a:t>17/04/2026</a:t>
+              <a:t>18/04/2026</a:t>
             </a:fld>
             <a:endParaRPr lang="en-GB"/>
           </a:p>
@@ -1347,7 +1347,7 @@
           <a:p>
             <a:fld id="{9DE42CF6-A011-4145-8138-B18222BE784F}" type="datetime1">
               <a:rPr lang="en-GB" smtClean="0"/>
-              <a:t>17/04/2026</a:t>
+              <a:t>18/04/2026</a:t>
             </a:fld>
             <a:endParaRPr lang="en-GB"/>
           </a:p>
@@ -1717,7 +1717,7 @@
           <a:p>
             <a:fld id="{16776141-2144-4216-A5D8-625EEC9D46A7}" type="datetime1">
               <a:rPr lang="en-GB" smtClean="0"/>
-              <a:t>17/04/2026</a:t>
+              <a:t>18/04/2026</a:t>
             </a:fld>
             <a:endParaRPr lang="en-GB"/>
           </a:p>
@@ -1838,7 +1838,7 @@
           <a:p>
             <a:fld id="{D5231884-8841-474E-B980-3663B77BB24B}" type="datetime1">
               <a:rPr lang="en-GB" smtClean="0"/>
-              <a:t>17/04/2026</a:t>
+              <a:t>18/04/2026</a:t>
             </a:fld>
             <a:endParaRPr lang="en-GB"/>
           </a:p>
@@ -1936,7 +1936,7 @@
           <a:p>
             <a:fld id="{981E740A-6F50-4770-9109-746EC93EBE8F}" type="datetime1">
               <a:rPr lang="en-GB" smtClean="0"/>
-              <a:t>17/04/2026</a:t>
+              <a:t>18/04/2026</a:t>
             </a:fld>
             <a:endParaRPr lang="en-GB"/>
           </a:p>
@@ -2216,7 +2216,7 @@
           <a:p>
             <a:fld id="{8C933542-D7FF-4C5D-BCD1-FC068661ADB1}" type="datetime1">
               <a:rPr lang="en-GB" smtClean="0"/>
-              <a:t>17/04/2026</a:t>
+              <a:t>18/04/2026</a:t>
             </a:fld>
             <a:endParaRPr lang="en-GB"/>
           </a:p>
@@ -2476,7 +2476,7 @@
           <a:p>
             <a:fld id="{F4A70A37-54E1-46AB-854A-7F4CAEAC5932}" type="datetime1">
               <a:rPr lang="en-GB" smtClean="0"/>
-              <a:t>17/04/2026</a:t>
+              <a:t>18/04/2026</a:t>
             </a:fld>
             <a:endParaRPr lang="en-GB"/>
           </a:p>
@@ -2700,7 +2700,7 @@
             <a:fld id="{4C18046E-BA9B-4548-A8AC-F9F2F702B23B}" type="datetime1">
               <a:rPr lang="en-GB" smtClean="0"/>
               <a:pPr/>
-              <a:t>17/04/2026</a:t>
+              <a:t>18/04/2026</a:t>
             </a:fld>
             <a:endParaRPr lang="en-GB"/>
           </a:p>
@@ -4899,16 +4899,16 @@
           <a:p>
             <a:pPr algn="ctr"/>
             <a:r>
-              <a:rPr lang="en-US" b="1" dirty="0" err="1">
-                <a:latin typeface="Times New Roman" panose="02020603050405020304" pitchFamily="18" charset="0"/>
-              </a:rPr>
-              <a:t>Bảng</a:t>
+              <a:rPr lang="vi-VN" b="1" dirty="0">
+                <a:latin typeface="Times New Roman" panose="02020603050405020304" pitchFamily="18" charset="0"/>
+              </a:rPr>
+              <a:t>S</a:t>
             </a:r>
             <a:r>
               <a:rPr lang="en-US" b="1" dirty="0">
                 <a:latin typeface="Times New Roman" panose="02020603050405020304" pitchFamily="18" charset="0"/>
               </a:rPr>
-              <a:t> so </a:t>
+              <a:t>o </a:t>
             </a:r>
             <a:r>
               <a:rPr lang="en-US" b="1" dirty="0" err="1">
@@ -5261,39 +5261,39 @@
             </a:r>
           </a:p>
           <a:p>
-            <a:pPr algn="l">
+            <a:pPr lvl="1" algn="l">
               <a:lnSpc>
                 <a:spcPct val="150000"/>
               </a:lnSpc>
             </a:pPr>
             <a:r>
-              <a:rPr lang="vi-VN" sz="2800" dirty="0"/>
+              <a:rPr lang="vi-VN" dirty="0"/>
               <a:t>SJF tối ưu thời gian chờ nhưng có hạn chế </a:t>
             </a:r>
             <a:r>
-              <a:rPr lang="vi-VN" sz="2800" dirty="0" err="1"/>
+              <a:rPr lang="vi-VN" dirty="0" err="1"/>
               <a:t>starvation</a:t>
             </a:r>
             <a:r>
-              <a:rPr lang="vi-VN" sz="2800" dirty="0"/>
+              <a:rPr lang="vi-VN" dirty="0"/>
               <a:t>.</a:t>
             </a:r>
           </a:p>
           <a:p>
-            <a:pPr algn="l">
+            <a:pPr lvl="1" algn="l">
               <a:lnSpc>
                 <a:spcPct val="150000"/>
               </a:lnSpc>
             </a:pPr>
             <a:r>
-              <a:rPr lang="vi-VN" sz="2800" dirty="0" err="1"/>
+              <a:rPr lang="vi-VN" dirty="0" err="1"/>
               <a:t>Priority</a:t>
             </a:r>
             <a:r>
-              <a:rPr lang="vi-VN" sz="2800" dirty="0"/>
+              <a:rPr lang="vi-VN" dirty="0"/>
               <a:t> phù hợp với hệ thống cần phân cấp ưu tiên.</a:t>
             </a:r>
-            <a:endParaRPr lang="en-US" sz="2800" dirty="0"/>
+            <a:endParaRPr lang="en-US" dirty="0"/>
           </a:p>
         </p:txBody>
       </p:sp>

--- a/PPTX/OS_SCH_04_GROUP08.pptx
+++ b/PPTX/OS_SCH_04_GROUP08.pptx
@@ -6819,19 +6819,7 @@
               <a:rPr lang="vi-VN" b="1" dirty="0">
                 <a:latin typeface="+mj-lt"/>
               </a:rPr>
-              <a:t>Lưu đồ giải thuật (</a:t>
-            </a:r>
-            <a:r>
-              <a:rPr lang="vi-VN" b="1" dirty="0" err="1">
-                <a:latin typeface="+mj-lt"/>
-              </a:rPr>
-              <a:t>Flowchart</a:t>
-            </a:r>
-            <a:r>
-              <a:rPr lang="vi-VN" b="1" dirty="0">
-                <a:latin typeface="+mj-lt"/>
-              </a:rPr>
-              <a:t>)</a:t>
+              <a:t>Các bước thực hiện thuật toán</a:t>
             </a:r>
             <a:endParaRPr lang="en-US" b="1" dirty="0">
               <a:latin typeface="+mj-lt"/>
